--- a/docs/NeuroLens-RAG-flowchart.pptx
+++ b/docs/NeuroLens-RAG-flowchart.pptx
@@ -7696,7 +7696,7 @@
                 </a:solidFill>
                 <a:latin typeface="Calibri"/>
               </a:rPr>
-              <a:t>brain→text CE only</a:t>
+              <a:t>symmetric multi-positive</a:t>
             </a:r>
           </a:p>
         </p:txBody>
